--- a/basics/iprep/meeting-analytics/final_version/meeting_analytics.pptx
+++ b/basics/iprep/meeting-analytics/final_version/meeting_analytics.pptx
@@ -317,7 +317,7 @@
           <a:p>
             <a:fld id="{5BCAD085-E8A6-8845-BD4E-CB4CCA059FC4}" type="datetimeFigureOut">
               <a:rPr lang="en-US" smtClean="0"/>
-              <a:t>5/10/26</a:t>
+              <a:t>5/11/26</a:t>
             </a:fld>
             <a:endParaRPr lang="en-US"/>
           </a:p>
@@ -485,7 +485,7 @@
           <a:p>
             <a:fld id="{5BCAD085-E8A6-8845-BD4E-CB4CCA059FC4}" type="datetimeFigureOut">
               <a:rPr lang="en-US" smtClean="0"/>
-              <a:t>5/10/26</a:t>
+              <a:t>5/11/26</a:t>
             </a:fld>
             <a:endParaRPr lang="en-US"/>
           </a:p>
@@ -663,7 +663,7 @@
           <a:p>
             <a:fld id="{5BCAD085-E8A6-8845-BD4E-CB4CCA059FC4}" type="datetimeFigureOut">
               <a:rPr lang="en-US" smtClean="0"/>
-              <a:t>5/10/26</a:t>
+              <a:t>5/11/26</a:t>
             </a:fld>
             <a:endParaRPr lang="en-US"/>
           </a:p>
@@ -831,7 +831,7 @@
           <a:p>
             <a:fld id="{5BCAD085-E8A6-8845-BD4E-CB4CCA059FC4}" type="datetimeFigureOut">
               <a:rPr lang="en-US" smtClean="0"/>
-              <a:t>5/10/26</a:t>
+              <a:t>5/11/26</a:t>
             </a:fld>
             <a:endParaRPr lang="en-US"/>
           </a:p>
@@ -1076,7 +1076,7 @@
           <a:p>
             <a:fld id="{5BCAD085-E8A6-8845-BD4E-CB4CCA059FC4}" type="datetimeFigureOut">
               <a:rPr lang="en-US" smtClean="0"/>
-              <a:t>5/10/26</a:t>
+              <a:t>5/11/26</a:t>
             </a:fld>
             <a:endParaRPr lang="en-US"/>
           </a:p>
@@ -1361,7 +1361,7 @@
           <a:p>
             <a:fld id="{5BCAD085-E8A6-8845-BD4E-CB4CCA059FC4}" type="datetimeFigureOut">
               <a:rPr lang="en-US" smtClean="0"/>
-              <a:t>5/10/26</a:t>
+              <a:t>5/11/26</a:t>
             </a:fld>
             <a:endParaRPr lang="en-US"/>
           </a:p>
@@ -1780,7 +1780,7 @@
           <a:p>
             <a:fld id="{5BCAD085-E8A6-8845-BD4E-CB4CCA059FC4}" type="datetimeFigureOut">
               <a:rPr lang="en-US" smtClean="0"/>
-              <a:t>5/10/26</a:t>
+              <a:t>5/11/26</a:t>
             </a:fld>
             <a:endParaRPr lang="en-US"/>
           </a:p>
@@ -1897,7 +1897,7 @@
           <a:p>
             <a:fld id="{5BCAD085-E8A6-8845-BD4E-CB4CCA059FC4}" type="datetimeFigureOut">
               <a:rPr lang="en-US" smtClean="0"/>
-              <a:t>5/10/26</a:t>
+              <a:t>5/11/26</a:t>
             </a:fld>
             <a:endParaRPr lang="en-US"/>
           </a:p>
@@ -1992,7 +1992,7 @@
           <a:p>
             <a:fld id="{5BCAD085-E8A6-8845-BD4E-CB4CCA059FC4}" type="datetimeFigureOut">
               <a:rPr lang="en-US" smtClean="0"/>
-              <a:t>5/10/26</a:t>
+              <a:t>5/11/26</a:t>
             </a:fld>
             <a:endParaRPr lang="en-US"/>
           </a:p>
@@ -2267,7 +2267,7 @@
           <a:p>
             <a:fld id="{5BCAD085-E8A6-8845-BD4E-CB4CCA059FC4}" type="datetimeFigureOut">
               <a:rPr lang="en-US" smtClean="0"/>
-              <a:t>5/10/26</a:t>
+              <a:t>5/11/26</a:t>
             </a:fld>
             <a:endParaRPr lang="en-US"/>
           </a:p>
@@ -2519,7 +2519,7 @@
           <a:p>
             <a:fld id="{5BCAD085-E8A6-8845-BD4E-CB4CCA059FC4}" type="datetimeFigureOut">
               <a:rPr lang="en-US" smtClean="0"/>
-              <a:t>5/10/26</a:t>
+              <a:t>5/11/26</a:t>
             </a:fld>
             <a:endParaRPr lang="en-US"/>
           </a:p>
@@ -2730,7 +2730,7 @@
           <a:p>
             <a:fld id="{5BCAD085-E8A6-8845-BD4E-CB4CCA059FC4}" type="datetimeFigureOut">
               <a:rPr lang="en-US" smtClean="0"/>
-              <a:t>5/10/26</a:t>
+              <a:t>5/11/26</a:t>
             </a:fld>
             <a:endParaRPr lang="en-US"/>
           </a:p>
@@ -3259,6 +3259,40 @@
           </a:p>
         </p:txBody>
       </p:sp>
+      <p:sp>
+        <p:nvSpPr>
+          <p:cNvPr id="6" name="TextBox 5"/>
+          <p:cNvSpPr txBox="1"/>
+          <p:nvPr/>
+        </p:nvSpPr>
+        <p:spPr>
+          <a:xfrm>
+            <a:off x="274320" y="6565392"/>
+            <a:ext cx="11612880" cy="228600"/>
+          </a:xfrm>
+          <a:prstGeom prst="rect">
+            <a:avLst/>
+          </a:prstGeom>
+          <a:noFill/>
+        </p:spPr>
+        <p:txBody>
+          <a:bodyPr wrap="none">
+            <a:spAutoFit/>
+          </a:bodyPr>
+          <a:lstStyle/>
+          <a:p>
+            <a:pPr algn="ctr"/>
+            <a:r>
+              <a:rPr sz="1000">
+                <a:solidFill>
+                  <a:srgbClr val="777777"/>
+                </a:solidFill>
+              </a:rPr>
+              <a:t>Vikrant Potnis  |  vikrant.potnis@gmail.com  |  Prepared for Aziro (client Rubrik)  |  May 11, 2026</a:t>
+            </a:r>
+          </a:p>
+        </p:txBody>
+      </p:sp>
     </p:spTree>
   </p:cSld>
   <p:clrMapOvr>
@@ -3386,7 +3420,7 @@
         <p:spPr>
           <a:xfrm>
             <a:off x="365760" y="1188720"/>
-            <a:ext cx="5120640" cy="594360"/>
+            <a:ext cx="4408371" cy="492443"/>
           </a:xfrm>
           <a:prstGeom prst="rect">
             <a:avLst/>
@@ -3419,8 +3453,8 @@
         </p:nvSpPr>
         <p:spPr>
           <a:xfrm>
-            <a:off x="365760" y="1645920"/>
-            <a:ext cx="5120640" cy="594360"/>
+            <a:off x="365760" y="1847088"/>
+            <a:ext cx="4158114" cy="492443"/>
           </a:xfrm>
           <a:prstGeom prst="rect">
             <a:avLst/>
@@ -3435,7 +3469,7 @@
           <a:p>
             <a:pPr algn="l"/>
             <a:r>
-              <a:rPr sz="1300" b="0" dirty="0">
+              <a:rPr sz="1300" b="0">
                 <a:solidFill>
                   <a:srgbClr val="444444"/>
                 </a:solidFill>
@@ -3453,8 +3487,8 @@
         </p:nvSpPr>
         <p:spPr>
           <a:xfrm>
-            <a:off x="365760" y="2121408"/>
-            <a:ext cx="5120640" cy="594360"/>
+            <a:off x="365760" y="2505456"/>
+            <a:ext cx="4408371" cy="492443"/>
           </a:xfrm>
           <a:prstGeom prst="rect">
             <a:avLst/>
@@ -3481,13 +3515,7 @@
       </p:sp>
       <p:pic>
         <p:nvPicPr>
-          <p:cNvPr id="9" name="Picture 8" descr="A screenshot of a computer&#10;&#10;AI-generated content may be incorrect.">
-            <a:extLst>
-              <a:ext uri="{FF2B5EF4-FFF2-40B4-BE49-F238E27FC236}">
-                <a16:creationId xmlns:a16="http://schemas.microsoft.com/office/drawing/2014/main" id="{03123A0F-2867-0A02-4403-3258FB2F109C}"/>
-              </a:ext>
-            </a:extLst>
-          </p:cNvPr>
+          <p:cNvPr id="7" name="Picture 6" descr="image.png"/>
           <p:cNvPicPr>
             <a:picLocks noChangeAspect="1"/>
           </p:cNvPicPr>
@@ -3501,14 +3529,48 @@
         </p:blipFill>
         <p:spPr>
           <a:xfrm>
-            <a:off x="365760" y="2715768"/>
-            <a:ext cx="9159949" cy="3835083"/>
+            <a:off x="4523874" y="836435"/>
+            <a:ext cx="7363326" cy="4213720"/>
           </a:xfrm>
           <a:prstGeom prst="rect">
             <a:avLst/>
           </a:prstGeom>
         </p:spPr>
       </p:pic>
+      <p:sp>
+        <p:nvSpPr>
+          <p:cNvPr id="8" name="TextBox 7"/>
+          <p:cNvSpPr txBox="1"/>
+          <p:nvPr/>
+        </p:nvSpPr>
+        <p:spPr>
+          <a:xfrm>
+            <a:off x="274320" y="6565392"/>
+            <a:ext cx="11612880" cy="228600"/>
+          </a:xfrm>
+          <a:prstGeom prst="rect">
+            <a:avLst/>
+          </a:prstGeom>
+          <a:noFill/>
+        </p:spPr>
+        <p:txBody>
+          <a:bodyPr wrap="none">
+            <a:spAutoFit/>
+          </a:bodyPr>
+          <a:lstStyle/>
+          <a:p>
+            <a:pPr algn="ctr"/>
+            <a:r>
+              <a:rPr sz="1000">
+                <a:solidFill>
+                  <a:srgbClr val="777777"/>
+                </a:solidFill>
+              </a:rPr>
+              <a:t>Vikrant Potnis  |  vikrant.potnis@gmail.com  |  Prepared for Aziro (client Rubrik)  |  May 11, 2026</a:t>
+            </a:r>
+          </a:p>
+        </p:txBody>
+      </p:sp>
     </p:spTree>
   </p:cSld>
   <p:clrMapOvr>
@@ -3745,14 +3807,48 @@
         </p:blipFill>
         <p:spPr>
           <a:xfrm>
-            <a:off x="5699051" y="263258"/>
-            <a:ext cx="6268955" cy="5377314"/>
+            <a:off x="5486400" y="164592"/>
+            <a:ext cx="6458601" cy="5504688"/>
           </a:xfrm>
           <a:prstGeom prst="rect">
             <a:avLst/>
           </a:prstGeom>
         </p:spPr>
       </p:pic>
+      <p:sp>
+        <p:nvSpPr>
+          <p:cNvPr id="8" name="TextBox 7"/>
+          <p:cNvSpPr txBox="1"/>
+          <p:nvPr/>
+        </p:nvSpPr>
+        <p:spPr>
+          <a:xfrm>
+            <a:off x="274320" y="6565392"/>
+            <a:ext cx="11612880" cy="228600"/>
+          </a:xfrm>
+          <a:prstGeom prst="rect">
+            <a:avLst/>
+          </a:prstGeom>
+          <a:noFill/>
+        </p:spPr>
+        <p:txBody>
+          <a:bodyPr wrap="none">
+            <a:spAutoFit/>
+          </a:bodyPr>
+          <a:lstStyle/>
+          <a:p>
+            <a:pPr algn="ctr"/>
+            <a:r>
+              <a:rPr sz="1000">
+                <a:solidFill>
+                  <a:srgbClr val="777777"/>
+                </a:solidFill>
+              </a:rPr>
+              <a:t>Vikrant Potnis  |  vikrant.potnis@gmail.com  |  Prepared for Aziro (client Rubrik)  |  May 11, 2026</a:t>
+            </a:r>
+          </a:p>
+        </p:txBody>
+      </p:sp>
     </p:spTree>
   </p:cSld>
   <p:clrMapOvr>
@@ -3989,14 +4085,48 @@
         </p:blipFill>
         <p:spPr>
           <a:xfrm>
-            <a:off x="5667153" y="182880"/>
-            <a:ext cx="6311487" cy="5463008"/>
+            <a:off x="5669280" y="182880"/>
+            <a:ext cx="6309360" cy="6400800"/>
           </a:xfrm>
           <a:prstGeom prst="rect">
             <a:avLst/>
           </a:prstGeom>
         </p:spPr>
       </p:pic>
+      <p:sp>
+        <p:nvSpPr>
+          <p:cNvPr id="8" name="TextBox 7"/>
+          <p:cNvSpPr txBox="1"/>
+          <p:nvPr/>
+        </p:nvSpPr>
+        <p:spPr>
+          <a:xfrm>
+            <a:off x="274320" y="6565392"/>
+            <a:ext cx="11612880" cy="228600"/>
+          </a:xfrm>
+          <a:prstGeom prst="rect">
+            <a:avLst/>
+          </a:prstGeom>
+          <a:noFill/>
+        </p:spPr>
+        <p:txBody>
+          <a:bodyPr wrap="none">
+            <a:spAutoFit/>
+          </a:bodyPr>
+          <a:lstStyle/>
+          <a:p>
+            <a:pPr algn="ctr"/>
+            <a:r>
+              <a:rPr sz="1000">
+                <a:solidFill>
+                  <a:srgbClr val="777777"/>
+                </a:solidFill>
+              </a:rPr>
+              <a:t>Vikrant Potnis  |  vikrant.potnis@gmail.com  |  Prepared for Aziro (client Rubrik)  |  May 11, 2026</a:t>
+            </a:r>
+          </a:p>
+        </p:txBody>
+      </p:sp>
     </p:spTree>
   </p:cSld>
   <p:clrMapOvr>
@@ -4233,14 +4363,48 @@
         </p:blipFill>
         <p:spPr>
           <a:xfrm>
-            <a:off x="5637382" y="548640"/>
-            <a:ext cx="6309360" cy="3453455"/>
+            <a:off x="5669280" y="182880"/>
+            <a:ext cx="6309360" cy="6400800"/>
           </a:xfrm>
           <a:prstGeom prst="rect">
             <a:avLst/>
           </a:prstGeom>
         </p:spPr>
       </p:pic>
+      <p:sp>
+        <p:nvSpPr>
+          <p:cNvPr id="8" name="TextBox 7"/>
+          <p:cNvSpPr txBox="1"/>
+          <p:nvPr/>
+        </p:nvSpPr>
+        <p:spPr>
+          <a:xfrm>
+            <a:off x="274320" y="6565392"/>
+            <a:ext cx="11612880" cy="228600"/>
+          </a:xfrm>
+          <a:prstGeom prst="rect">
+            <a:avLst/>
+          </a:prstGeom>
+          <a:noFill/>
+        </p:spPr>
+        <p:txBody>
+          <a:bodyPr wrap="none">
+            <a:spAutoFit/>
+          </a:bodyPr>
+          <a:lstStyle/>
+          <a:p>
+            <a:pPr algn="ctr"/>
+            <a:r>
+              <a:rPr sz="1000">
+                <a:solidFill>
+                  <a:srgbClr val="777777"/>
+                </a:solidFill>
+              </a:rPr>
+              <a:t>Vikrant Potnis  |  vikrant.potnis@gmail.com  |  Prepared for Aziro (client Rubrik)  |  May 11, 2026</a:t>
+            </a:r>
+          </a:p>
+        </p:txBody>
+      </p:sp>
     </p:spTree>
   </p:cSld>
   <p:clrMapOvr>
@@ -4478,13 +4642,47 @@
         <p:spPr>
           <a:xfrm>
             <a:off x="5669280" y="182880"/>
-            <a:ext cx="6309360" cy="5962739"/>
+            <a:ext cx="6309360" cy="6400800"/>
           </a:xfrm>
           <a:prstGeom prst="rect">
             <a:avLst/>
           </a:prstGeom>
         </p:spPr>
       </p:pic>
+      <p:sp>
+        <p:nvSpPr>
+          <p:cNvPr id="8" name="TextBox 7"/>
+          <p:cNvSpPr txBox="1"/>
+          <p:nvPr/>
+        </p:nvSpPr>
+        <p:spPr>
+          <a:xfrm>
+            <a:off x="274320" y="6565392"/>
+            <a:ext cx="11612880" cy="228600"/>
+          </a:xfrm>
+          <a:prstGeom prst="rect">
+            <a:avLst/>
+          </a:prstGeom>
+          <a:noFill/>
+        </p:spPr>
+        <p:txBody>
+          <a:bodyPr wrap="none">
+            <a:spAutoFit/>
+          </a:bodyPr>
+          <a:lstStyle/>
+          <a:p>
+            <a:pPr algn="ctr"/>
+            <a:r>
+              <a:rPr sz="1000">
+                <a:solidFill>
+                  <a:srgbClr val="777777"/>
+                </a:solidFill>
+              </a:rPr>
+              <a:t>Vikrant Potnis  |  vikrant.potnis@gmail.com  |  Prepared for Aziro (client Rubrik)  |  May 11, 2026</a:t>
+            </a:r>
+          </a:p>
+        </p:txBody>
+      </p:sp>
     </p:spTree>
   </p:cSld>
   <p:clrMapOvr>
@@ -4729,6 +4927,40 @@
           </a:prstGeom>
         </p:spPr>
       </p:pic>
+      <p:sp>
+        <p:nvSpPr>
+          <p:cNvPr id="8" name="TextBox 7"/>
+          <p:cNvSpPr txBox="1"/>
+          <p:nvPr/>
+        </p:nvSpPr>
+        <p:spPr>
+          <a:xfrm>
+            <a:off x="274320" y="6565392"/>
+            <a:ext cx="11612880" cy="228600"/>
+          </a:xfrm>
+          <a:prstGeom prst="rect">
+            <a:avLst/>
+          </a:prstGeom>
+          <a:noFill/>
+        </p:spPr>
+        <p:txBody>
+          <a:bodyPr wrap="none">
+            <a:spAutoFit/>
+          </a:bodyPr>
+          <a:lstStyle/>
+          <a:p>
+            <a:pPr algn="ctr"/>
+            <a:r>
+              <a:rPr sz="1000">
+                <a:solidFill>
+                  <a:srgbClr val="777777"/>
+                </a:solidFill>
+              </a:rPr>
+              <a:t>Vikrant Potnis  |  vikrant.potnis@gmail.com  |  Prepared for Aziro (client Rubrik)  |  May 11, 2026</a:t>
+            </a:r>
+          </a:p>
+        </p:txBody>
+      </p:sp>
     </p:spTree>
   </p:cSld>
   <p:clrMapOvr>
@@ -5153,6 +5385,40 @@
           </a:p>
         </p:txBody>
       </p:sp>
+      <p:sp>
+        <p:nvSpPr>
+          <p:cNvPr id="12" name="TextBox 11"/>
+          <p:cNvSpPr txBox="1"/>
+          <p:nvPr/>
+        </p:nvSpPr>
+        <p:spPr>
+          <a:xfrm>
+            <a:off x="274320" y="6565392"/>
+            <a:ext cx="11612880" cy="228600"/>
+          </a:xfrm>
+          <a:prstGeom prst="rect">
+            <a:avLst/>
+          </a:prstGeom>
+          <a:noFill/>
+        </p:spPr>
+        <p:txBody>
+          <a:bodyPr wrap="none">
+            <a:spAutoFit/>
+          </a:bodyPr>
+          <a:lstStyle/>
+          <a:p>
+            <a:pPr algn="ctr"/>
+            <a:r>
+              <a:rPr sz="1000">
+                <a:solidFill>
+                  <a:srgbClr val="777777"/>
+                </a:solidFill>
+              </a:rPr>
+              <a:t>Vikrant Potnis  |  vikrant.potnis@gmail.com  |  Prepared for Aziro (client Rubrik)  |  May 11, 2026</a:t>
+            </a:r>
+          </a:p>
+        </p:txBody>
+      </p:sp>
     </p:spTree>
   </p:cSld>
   <p:clrMapOvr>
@@ -5373,6 +5639,40 @@
           </a:p>
         </p:txBody>
       </p:sp>
+      <p:sp>
+        <p:nvSpPr>
+          <p:cNvPr id="7" name="TextBox 6"/>
+          <p:cNvSpPr txBox="1"/>
+          <p:nvPr/>
+        </p:nvSpPr>
+        <p:spPr>
+          <a:xfrm>
+            <a:off x="274320" y="6565392"/>
+            <a:ext cx="11612880" cy="228600"/>
+          </a:xfrm>
+          <a:prstGeom prst="rect">
+            <a:avLst/>
+          </a:prstGeom>
+          <a:noFill/>
+        </p:spPr>
+        <p:txBody>
+          <a:bodyPr wrap="none">
+            <a:spAutoFit/>
+          </a:bodyPr>
+          <a:lstStyle/>
+          <a:p>
+            <a:pPr algn="ctr"/>
+            <a:r>
+              <a:rPr sz="1000">
+                <a:solidFill>
+                  <a:srgbClr val="777777"/>
+                </a:solidFill>
+              </a:rPr>
+              <a:t>Vikrant Potnis  |  vikrant.potnis@gmail.com  |  Prepared for Aziro (client Rubrik)  |  May 11, 2026</a:t>
+            </a:r>
+          </a:p>
+        </p:txBody>
+      </p:sp>
     </p:spTree>
   </p:cSld>
   <p:clrMapOvr>
@@ -5593,6 +5893,40 @@
           </a:p>
         </p:txBody>
       </p:sp>
+      <p:sp>
+        <p:nvSpPr>
+          <p:cNvPr id="7" name="TextBox 6"/>
+          <p:cNvSpPr txBox="1"/>
+          <p:nvPr/>
+        </p:nvSpPr>
+        <p:spPr>
+          <a:xfrm>
+            <a:off x="274320" y="6565392"/>
+            <a:ext cx="11612880" cy="228600"/>
+          </a:xfrm>
+          <a:prstGeom prst="rect">
+            <a:avLst/>
+          </a:prstGeom>
+          <a:noFill/>
+        </p:spPr>
+        <p:txBody>
+          <a:bodyPr wrap="none">
+            <a:spAutoFit/>
+          </a:bodyPr>
+          <a:lstStyle/>
+          <a:p>
+            <a:pPr algn="ctr"/>
+            <a:r>
+              <a:rPr sz="1000">
+                <a:solidFill>
+                  <a:srgbClr val="777777"/>
+                </a:solidFill>
+              </a:rPr>
+              <a:t>Vikrant Potnis  |  vikrant.potnis@gmail.com  |  Prepared for Aziro (client Rubrik)  |  May 11, 2026</a:t>
+            </a:r>
+          </a:p>
+        </p:txBody>
+      </p:sp>
     </p:spTree>
   </p:cSld>
   <p:clrMapOvr>
@@ -5813,6 +6147,40 @@
           </a:p>
         </p:txBody>
       </p:sp>
+      <p:sp>
+        <p:nvSpPr>
+          <p:cNvPr id="7" name="TextBox 6"/>
+          <p:cNvSpPr txBox="1"/>
+          <p:nvPr/>
+        </p:nvSpPr>
+        <p:spPr>
+          <a:xfrm>
+            <a:off x="274320" y="6565392"/>
+            <a:ext cx="11612880" cy="228600"/>
+          </a:xfrm>
+          <a:prstGeom prst="rect">
+            <a:avLst/>
+          </a:prstGeom>
+          <a:noFill/>
+        </p:spPr>
+        <p:txBody>
+          <a:bodyPr wrap="none">
+            <a:spAutoFit/>
+          </a:bodyPr>
+          <a:lstStyle/>
+          <a:p>
+            <a:pPr algn="ctr"/>
+            <a:r>
+              <a:rPr sz="1000">
+                <a:solidFill>
+                  <a:srgbClr val="777777"/>
+                </a:solidFill>
+              </a:rPr>
+              <a:t>Vikrant Potnis  |  vikrant.potnis@gmail.com  |  Prepared for Aziro (client Rubrik)  |  May 11, 2026</a:t>
+            </a:r>
+          </a:p>
+        </p:txBody>
+      </p:sp>
     </p:spTree>
   </p:cSld>
   <p:clrMapOvr>
@@ -5972,6 +6340,40 @@
           </a:p>
         </p:txBody>
       </p:sp>
+      <p:sp>
+        <p:nvSpPr>
+          <p:cNvPr id="6" name="TextBox 5"/>
+          <p:cNvSpPr txBox="1"/>
+          <p:nvPr/>
+        </p:nvSpPr>
+        <p:spPr>
+          <a:xfrm>
+            <a:off x="274320" y="6565392"/>
+            <a:ext cx="11612880" cy="228600"/>
+          </a:xfrm>
+          <a:prstGeom prst="rect">
+            <a:avLst/>
+          </a:prstGeom>
+          <a:noFill/>
+        </p:spPr>
+        <p:txBody>
+          <a:bodyPr wrap="none">
+            <a:spAutoFit/>
+          </a:bodyPr>
+          <a:lstStyle/>
+          <a:p>
+            <a:pPr algn="ctr"/>
+            <a:r>
+              <a:rPr sz="1000">
+                <a:solidFill>
+                  <a:srgbClr val="777777"/>
+                </a:solidFill>
+              </a:rPr>
+              <a:t>Vikrant Potnis  |  vikrant.potnis@gmail.com  |  Prepared for Aziro (client Rubrik)  |  May 11, 2026</a:t>
+            </a:r>
+          </a:p>
+        </p:txBody>
+      </p:sp>
     </p:spTree>
   </p:cSld>
   <p:clrMapOvr>
@@ -6208,14 +6610,48 @@
         </p:blipFill>
         <p:spPr>
           <a:xfrm>
-            <a:off x="5359306" y="356615"/>
-            <a:ext cx="6829519" cy="4892041"/>
+            <a:off x="5056357" y="596766"/>
+            <a:ext cx="6474708" cy="5032633"/>
           </a:xfrm>
           <a:prstGeom prst="rect">
             <a:avLst/>
           </a:prstGeom>
         </p:spPr>
       </p:pic>
+      <p:sp>
+        <p:nvSpPr>
+          <p:cNvPr id="8" name="TextBox 7"/>
+          <p:cNvSpPr txBox="1"/>
+          <p:nvPr/>
+        </p:nvSpPr>
+        <p:spPr>
+          <a:xfrm>
+            <a:off x="274320" y="6565392"/>
+            <a:ext cx="11612880" cy="228600"/>
+          </a:xfrm>
+          <a:prstGeom prst="rect">
+            <a:avLst/>
+          </a:prstGeom>
+          <a:noFill/>
+        </p:spPr>
+        <p:txBody>
+          <a:bodyPr wrap="none">
+            <a:spAutoFit/>
+          </a:bodyPr>
+          <a:lstStyle/>
+          <a:p>
+            <a:pPr algn="ctr"/>
+            <a:r>
+              <a:rPr sz="1000">
+                <a:solidFill>
+                  <a:srgbClr val="777777"/>
+                </a:solidFill>
+              </a:rPr>
+              <a:t>Vikrant Potnis  |  vikrant.potnis@gmail.com  |  Prepared for Aziro (client Rubrik)  |  May 11, 2026</a:t>
+            </a:r>
+          </a:p>
+        </p:txBody>
+      </p:sp>
     </p:spTree>
   </p:cSld>
   <p:clrMapOvr>
@@ -6460,6 +6896,40 @@
           </a:prstGeom>
         </p:spPr>
       </p:pic>
+      <p:sp>
+        <p:nvSpPr>
+          <p:cNvPr id="8" name="TextBox 7"/>
+          <p:cNvSpPr txBox="1"/>
+          <p:nvPr/>
+        </p:nvSpPr>
+        <p:spPr>
+          <a:xfrm>
+            <a:off x="274320" y="6565392"/>
+            <a:ext cx="11612880" cy="228600"/>
+          </a:xfrm>
+          <a:prstGeom prst="rect">
+            <a:avLst/>
+          </a:prstGeom>
+          <a:noFill/>
+        </p:spPr>
+        <p:txBody>
+          <a:bodyPr wrap="none">
+            <a:spAutoFit/>
+          </a:bodyPr>
+          <a:lstStyle/>
+          <a:p>
+            <a:pPr algn="ctr"/>
+            <a:r>
+              <a:rPr sz="1000">
+                <a:solidFill>
+                  <a:srgbClr val="777777"/>
+                </a:solidFill>
+              </a:rPr>
+              <a:t>Vikrant Potnis  |  vikrant.potnis@gmail.com  |  Prepared for Aziro (client Rubrik)  |  May 11, 2026</a:t>
+            </a:r>
+          </a:p>
+        </p:txBody>
+      </p:sp>
     </p:spTree>
   </p:cSld>
   <p:clrMapOvr>
@@ -6696,14 +7166,48 @@
         </p:blipFill>
         <p:spPr>
           <a:xfrm>
-            <a:off x="5329038" y="119084"/>
-            <a:ext cx="6675120" cy="6400800"/>
+            <a:off x="5669280" y="182880"/>
+            <a:ext cx="6309360" cy="6400800"/>
           </a:xfrm>
           <a:prstGeom prst="rect">
             <a:avLst/>
           </a:prstGeom>
         </p:spPr>
       </p:pic>
+      <p:sp>
+        <p:nvSpPr>
+          <p:cNvPr id="8" name="TextBox 7"/>
+          <p:cNvSpPr txBox="1"/>
+          <p:nvPr/>
+        </p:nvSpPr>
+        <p:spPr>
+          <a:xfrm>
+            <a:off x="274320" y="6565392"/>
+            <a:ext cx="11612880" cy="228600"/>
+          </a:xfrm>
+          <a:prstGeom prst="rect">
+            <a:avLst/>
+          </a:prstGeom>
+          <a:noFill/>
+        </p:spPr>
+        <p:txBody>
+          <a:bodyPr wrap="none">
+            <a:spAutoFit/>
+          </a:bodyPr>
+          <a:lstStyle/>
+          <a:p>
+            <a:pPr algn="ctr"/>
+            <a:r>
+              <a:rPr sz="1000">
+                <a:solidFill>
+                  <a:srgbClr val="777777"/>
+                </a:solidFill>
+              </a:rPr>
+              <a:t>Vikrant Potnis  |  vikrant.potnis@gmail.com  |  Prepared for Aziro (client Rubrik)  |  May 11, 2026</a:t>
+            </a:r>
+          </a:p>
+        </p:txBody>
+      </p:sp>
     </p:spTree>
   </p:cSld>
   <p:clrMapOvr>
@@ -6948,6 +7452,40 @@
           </a:prstGeom>
         </p:spPr>
       </p:pic>
+      <p:sp>
+        <p:nvSpPr>
+          <p:cNvPr id="8" name="TextBox 7"/>
+          <p:cNvSpPr txBox="1"/>
+          <p:nvPr/>
+        </p:nvSpPr>
+        <p:spPr>
+          <a:xfrm>
+            <a:off x="274320" y="6565392"/>
+            <a:ext cx="11612880" cy="228600"/>
+          </a:xfrm>
+          <a:prstGeom prst="rect">
+            <a:avLst/>
+          </a:prstGeom>
+          <a:noFill/>
+        </p:spPr>
+        <p:txBody>
+          <a:bodyPr wrap="none">
+            <a:spAutoFit/>
+          </a:bodyPr>
+          <a:lstStyle/>
+          <a:p>
+            <a:pPr algn="ctr"/>
+            <a:r>
+              <a:rPr sz="1000">
+                <a:solidFill>
+                  <a:srgbClr val="777777"/>
+                </a:solidFill>
+              </a:rPr>
+              <a:t>Vikrant Potnis  |  vikrant.potnis@gmail.com  |  Prepared for Aziro (client Rubrik)  |  May 11, 2026</a:t>
+            </a:r>
+          </a:p>
+        </p:txBody>
+      </p:sp>
     </p:spTree>
   </p:cSld>
   <p:clrMapOvr>

--- a/basics/iprep/meeting-analytics/final_version/meeting_analytics.pptx
+++ b/basics/iprep/meeting-analytics/final_version/meeting_analytics.pptx
@@ -3420,7 +3420,7 @@
         <p:spPr>
           <a:xfrm>
             <a:off x="365760" y="1188720"/>
-            <a:ext cx="4408371" cy="492443"/>
+            <a:ext cx="3984859" cy="492443"/>
           </a:xfrm>
           <a:prstGeom prst="rect">
             <a:avLst/>
@@ -3454,7 +3454,7 @@
         <p:spPr>
           <a:xfrm>
             <a:off x="365760" y="1847088"/>
-            <a:ext cx="4158114" cy="492443"/>
+            <a:ext cx="4177364" cy="492443"/>
           </a:xfrm>
           <a:prstGeom prst="rect">
             <a:avLst/>
@@ -3488,7 +3488,7 @@
         <p:spPr>
           <a:xfrm>
             <a:off x="365760" y="2505456"/>
-            <a:ext cx="4408371" cy="492443"/>
+            <a:ext cx="4100362" cy="492443"/>
           </a:xfrm>
           <a:prstGeom prst="rect">
             <a:avLst/>
@@ -3503,7 +3503,7 @@
           <a:p>
             <a:pPr algn="l"/>
             <a:r>
-              <a:rPr sz="1300" b="0" dirty="0">
+              <a:rPr sz="1300" b="0">
                 <a:solidFill>
                   <a:srgbClr val="444444"/>
                 </a:solidFill>
@@ -3529,8 +3529,8 @@
         </p:blipFill>
         <p:spPr>
           <a:xfrm>
-            <a:off x="4523874" y="836435"/>
-            <a:ext cx="7363326" cy="4213720"/>
+            <a:off x="5043433" y="500514"/>
+            <a:ext cx="6944832" cy="5332395"/>
           </a:xfrm>
           <a:prstGeom prst="rect">
             <a:avLst/>
@@ -3807,8 +3807,8 @@
         </p:blipFill>
         <p:spPr>
           <a:xfrm>
-            <a:off x="5486400" y="164592"/>
-            <a:ext cx="6458601" cy="5504688"/>
+            <a:off x="5577840" y="442762"/>
+            <a:ext cx="6309360" cy="5159141"/>
           </a:xfrm>
           <a:prstGeom prst="rect">
             <a:avLst/>
@@ -4086,7 +4086,7 @@
         <p:spPr>
           <a:xfrm>
             <a:off x="5669280" y="182880"/>
-            <a:ext cx="6309360" cy="6400800"/>
+            <a:ext cx="6309360" cy="5351646"/>
           </a:xfrm>
           <a:prstGeom prst="rect">
             <a:avLst/>
@@ -4254,7 +4254,7 @@
         <p:spPr>
           <a:xfrm>
             <a:off x="365760" y="1188720"/>
-            <a:ext cx="5120640" cy="594360"/>
+            <a:ext cx="4494998" cy="492443"/>
           </a:xfrm>
           <a:prstGeom prst="rect">
             <a:avLst/>
@@ -4269,26 +4269,60 @@
           <a:p>
             <a:pPr algn="l"/>
             <a:r>
+              <a:rPr sz="1300" b="0" dirty="0">
+                <a:solidFill>
+                  <a:srgbClr val="444444"/>
+                </a:solidFill>
+              </a:rPr>
+              <a:t>• Renewal meetings mentioning Detect are significantly more negative than those that do not</a:t>
+            </a:r>
+          </a:p>
+        </p:txBody>
+      </p:sp>
+      <p:sp>
+        <p:nvSpPr>
+          <p:cNvPr id="5" name="TextBox 4"/>
+          <p:cNvSpPr txBox="1"/>
+          <p:nvPr/>
+        </p:nvSpPr>
+        <p:spPr>
+          <a:xfrm>
+            <a:off x="365760" y="1847088"/>
+            <a:ext cx="4494998" cy="492443"/>
+          </a:xfrm>
+          <a:prstGeom prst="rect">
+            <a:avLst/>
+          </a:prstGeom>
+          <a:noFill/>
+        </p:spPr>
+        <p:txBody>
+          <a:bodyPr wrap="square">
+            <a:spAutoFit/>
+          </a:bodyPr>
+          <a:lstStyle/>
+          <a:p>
+            <a:pPr algn="l"/>
+            <a:r>
               <a:rPr sz="1300" b="0">
                 <a:solidFill>
                   <a:srgbClr val="444444"/>
                 </a:solidFill>
               </a:rPr>
-              <a:t>• Renewal meetings mentioning Detect are significantly more negative than those that do not</a:t>
-            </a:r>
-          </a:p>
-        </p:txBody>
-      </p:sp>
-      <p:sp>
-        <p:nvSpPr>
-          <p:cNvPr id="5" name="TextBox 4"/>
-          <p:cNvSpPr txBox="1"/>
-          <p:nvPr/>
-        </p:nvSpPr>
-        <p:spPr>
-          <a:xfrm>
-            <a:off x="365760" y="1847088"/>
-            <a:ext cx="5120640" cy="594360"/>
+              <a:t>• Over half of Detect renewal meetings carry an explicit churn signal</a:t>
+            </a:r>
+          </a:p>
+        </p:txBody>
+      </p:sp>
+      <p:sp>
+        <p:nvSpPr>
+          <p:cNvPr id="6" name="TextBox 5"/>
+          <p:cNvSpPr txBox="1"/>
+          <p:nvPr/>
+        </p:nvSpPr>
+        <p:spPr>
+          <a:xfrm>
+            <a:off x="365760" y="2505456"/>
+            <a:ext cx="4321743" cy="492443"/>
           </a:xfrm>
           <a:prstGeom prst="rect">
             <a:avLst/>
@@ -4303,41 +4337,7 @@
           <a:p>
             <a:pPr algn="l"/>
             <a:r>
-              <a:rPr sz="1300" b="0">
-                <a:solidFill>
-                  <a:srgbClr val="444444"/>
-                </a:solidFill>
-              </a:rPr>
-              <a:t>• Over half of Detect renewal meetings carry an explicit churn signal</a:t>
-            </a:r>
-          </a:p>
-        </p:txBody>
-      </p:sp>
-      <p:sp>
-        <p:nvSpPr>
-          <p:cNvPr id="6" name="TextBox 5"/>
-          <p:cNvSpPr txBox="1"/>
-          <p:nvPr/>
-        </p:nvSpPr>
-        <p:spPr>
-          <a:xfrm>
-            <a:off x="365760" y="2505456"/>
-            <a:ext cx="5120640" cy="594360"/>
-          </a:xfrm>
-          <a:prstGeom prst="rect">
-            <a:avLst/>
-          </a:prstGeom>
-          <a:noFill/>
-        </p:spPr>
-        <p:txBody>
-          <a:bodyPr wrap="square">
-            <a:spAutoFit/>
-          </a:bodyPr>
-          <a:lstStyle/>
-          <a:p>
-            <a:pPr algn="l"/>
-            <a:r>
-              <a:rPr sz="1300" b="0">
+              <a:rPr sz="1300" b="0" dirty="0">
                 <a:solidFill>
                   <a:srgbClr val="444444"/>
                 </a:solidFill>
@@ -4363,8 +4363,8 @@
         </p:blipFill>
         <p:spPr>
           <a:xfrm>
-            <a:off x="5669280" y="182880"/>
-            <a:ext cx="6309360" cy="6400800"/>
+            <a:off x="4860758" y="841248"/>
+            <a:ext cx="7181539" cy="3750003"/>
           </a:xfrm>
           <a:prstGeom prst="rect">
             <a:avLst/>
@@ -4641,8 +4641,8 @@
         </p:blipFill>
         <p:spPr>
           <a:xfrm>
-            <a:off x="5669280" y="182880"/>
-            <a:ext cx="6309360" cy="6400800"/>
+            <a:off x="5678905" y="182880"/>
+            <a:ext cx="6309360" cy="5640404"/>
           </a:xfrm>
           <a:prstGeom prst="rect">
             <a:avLst/>
@@ -4810,7 +4810,7 @@
         <p:spPr>
           <a:xfrm>
             <a:off x="365760" y="1188720"/>
-            <a:ext cx="5120640" cy="594360"/>
+            <a:ext cx="4706754" cy="492443"/>
           </a:xfrm>
           <a:prstGeom prst="rect">
             <a:avLst/>
@@ -4825,7 +4825,7 @@
           <a:p>
             <a:pPr algn="l"/>
             <a:r>
-              <a:rPr sz="1300" b="0">
+              <a:rPr sz="1300" b="0" dirty="0">
                 <a:solidFill>
                   <a:srgbClr val="444444"/>
                 </a:solidFill>
@@ -4844,7 +4844,7 @@
         <p:spPr>
           <a:xfrm>
             <a:off x="365760" y="1847088"/>
-            <a:ext cx="5120640" cy="594360"/>
+            <a:ext cx="4706754" cy="492443"/>
           </a:xfrm>
           <a:prstGeom prst="rect">
             <a:avLst/>
@@ -4859,7 +4859,7 @@
           <a:p>
             <a:pPr algn="l"/>
             <a:r>
-              <a:rPr sz="1300" b="0">
+              <a:rPr sz="1300" b="0" dirty="0">
                 <a:solidFill>
                   <a:srgbClr val="444444"/>
                 </a:solidFill>
@@ -4878,7 +4878,7 @@
         <p:spPr>
           <a:xfrm>
             <a:off x="365760" y="2505456"/>
-            <a:ext cx="5120640" cy="594360"/>
+            <a:ext cx="4706754" cy="492443"/>
           </a:xfrm>
           <a:prstGeom prst="rect">
             <a:avLst/>
@@ -4919,8 +4919,8 @@
         </p:blipFill>
         <p:spPr>
           <a:xfrm>
-            <a:off x="5669280" y="182880"/>
-            <a:ext cx="6309360" cy="6400800"/>
+            <a:off x="4985886" y="228600"/>
+            <a:ext cx="6992754" cy="5379247"/>
           </a:xfrm>
           <a:prstGeom prst="rect">
             <a:avLst/>
@@ -5256,7 +5256,7 @@
           <a:p>
             <a:pPr algn="l"/>
             <a:r>
-              <a:rPr sz="1400" b="0">
+              <a:rPr sz="1400" b="0" dirty="0">
                 <a:solidFill>
                   <a:srgbClr val="CCCCCC"/>
                 </a:solidFill>
@@ -5380,7 +5380,7 @@
                   <a:srgbClr val="CCCCCC"/>
                 </a:solidFill>
               </a:rPr>
-              <a:t>It is the strongest counter-narrative in the data</a:t>
+              <a:t>Give them a reason to stay, not just an apology</a:t>
             </a:r>
           </a:p>
         </p:txBody>
@@ -6500,8 +6500,8 @@
         </p:nvSpPr>
         <p:spPr>
           <a:xfrm>
-            <a:off x="365760" y="1188720"/>
-            <a:ext cx="5120640" cy="594360"/>
+            <a:off x="365760" y="1143000"/>
+            <a:ext cx="4417996" cy="492443"/>
           </a:xfrm>
           <a:prstGeom prst="rect">
             <a:avLst/>
@@ -6535,7 +6535,7 @@
         <p:spPr>
           <a:xfrm>
             <a:off x="365760" y="1847088"/>
-            <a:ext cx="5120640" cy="594360"/>
+            <a:ext cx="4292867" cy="492443"/>
           </a:xfrm>
           <a:prstGeom prst="rect">
             <a:avLst/>
@@ -6550,7 +6550,7 @@
           <a:p>
             <a:pPr algn="l"/>
             <a:r>
-              <a:rPr sz="1300" b="0">
+              <a:rPr sz="1300" b="0" dirty="0">
                 <a:solidFill>
                   <a:srgbClr val="444444"/>
                 </a:solidFill>
@@ -6569,7 +6569,7 @@
         <p:spPr>
           <a:xfrm>
             <a:off x="365760" y="2505456"/>
-            <a:ext cx="5120640" cy="594360"/>
+            <a:ext cx="4167739" cy="292388"/>
           </a:xfrm>
           <a:prstGeom prst="rect">
             <a:avLst/>
@@ -6610,8 +6610,8 @@
         </p:blipFill>
         <p:spPr>
           <a:xfrm>
-            <a:off x="5056357" y="596766"/>
-            <a:ext cx="6474708" cy="5032633"/>
+            <a:off x="5202455" y="699536"/>
+            <a:ext cx="6684745" cy="4517357"/>
           </a:xfrm>
           <a:prstGeom prst="rect">
             <a:avLst/>
@@ -7335,7 +7335,7 @@
         <p:spPr>
           <a:xfrm>
             <a:off x="365760" y="1188720"/>
-            <a:ext cx="5120640" cy="594360"/>
+            <a:ext cx="4494998" cy="492443"/>
           </a:xfrm>
           <a:prstGeom prst="rect">
             <a:avLst/>
@@ -7350,45 +7350,45 @@
           <a:p>
             <a:pPr algn="l"/>
             <a:r>
+              <a:rPr sz="1300" b="0" dirty="0">
+                <a:solidFill>
+                  <a:srgbClr val="444444"/>
+                </a:solidFill>
+              </a:rPr>
+              <a:t>• Churn signals = moments where customers explicitly expressed risk of leaving</a:t>
+            </a:r>
+          </a:p>
+        </p:txBody>
+      </p:sp>
+      <p:sp>
+        <p:nvSpPr>
+          <p:cNvPr id="5" name="TextBox 4"/>
+          <p:cNvSpPr txBox="1"/>
+          <p:nvPr/>
+        </p:nvSpPr>
+        <p:spPr>
+          <a:xfrm>
+            <a:off x="365760" y="1847088"/>
+            <a:ext cx="4023360" cy="492443"/>
+          </a:xfrm>
+          <a:prstGeom prst="rect">
+            <a:avLst/>
+          </a:prstGeom>
+          <a:noFill/>
+        </p:spPr>
+        <p:txBody>
+          <a:bodyPr wrap="square">
+            <a:spAutoFit/>
+          </a:bodyPr>
+          <a:lstStyle/>
+          <a:p>
+            <a:pPr algn="l"/>
+            <a:r>
               <a:rPr sz="1300" b="0">
                 <a:solidFill>
                   <a:srgbClr val="444444"/>
                 </a:solidFill>
               </a:rPr>
-              <a:t>• Churn signals = moments where customers explicitly expressed risk of leaving</a:t>
-            </a:r>
-          </a:p>
-        </p:txBody>
-      </p:sp>
-      <p:sp>
-        <p:nvSpPr>
-          <p:cNvPr id="5" name="TextBox 4"/>
-          <p:cNvSpPr txBox="1"/>
-          <p:nvPr/>
-        </p:nvSpPr>
-        <p:spPr>
-          <a:xfrm>
-            <a:off x="365760" y="1847088"/>
-            <a:ext cx="5120640" cy="594360"/>
-          </a:xfrm>
-          <a:prstGeom prst="rect">
-            <a:avLst/>
-          </a:prstGeom>
-          <a:noFill/>
-        </p:spPr>
-        <p:txBody>
-          <a:bodyPr wrap="square">
-            <a:spAutoFit/>
-          </a:bodyPr>
-          <a:lstStyle/>
-          <a:p>
-            <a:pPr algn="l"/>
-            <a:r>
-              <a:rPr sz="1300" b="0">
-                <a:solidFill>
-                  <a:srgbClr val="444444"/>
-                </a:solidFill>
-              </a:rPr>
               <a:t>• Detect generates far more churn signals than any other product</a:t>
             </a:r>
           </a:p>
@@ -7403,7 +7403,7 @@
         <p:spPr>
           <a:xfrm>
             <a:off x="365760" y="2505456"/>
-            <a:ext cx="5120640" cy="594360"/>
+            <a:ext cx="3946358" cy="492443"/>
           </a:xfrm>
           <a:prstGeom prst="rect">
             <a:avLst/>
@@ -7444,8 +7444,8 @@
         </p:blipFill>
         <p:spPr>
           <a:xfrm>
-            <a:off x="5669280" y="182880"/>
-            <a:ext cx="6309360" cy="6400800"/>
+            <a:off x="5120640" y="416580"/>
+            <a:ext cx="6858000" cy="5705087"/>
           </a:xfrm>
           <a:prstGeom prst="rect">
             <a:avLst/>
